--- a/Final_Project_Time_Series.pptx
+++ b/Final_Project_Time_Series.pptx
@@ -22854,16 +22854,12 @@
           </a:p>
           <a:p>
             <a:r>
-              <a:rPr lang="en-US" b="1" dirty="0">
-                <a:hlinkClick r:id="rId1"/>
+              <a:rPr lang="en-US" altLang="en-US" dirty="0">
+                <a:hlinkClick r:id="rId1" tooltip="" action="ppaction://hlinkfile"/>
               </a:rPr>
               <a:t>https://github.com/TheAbhi2004/Machine-Learning-Capstone</a:t>
             </a:r>
-            <a:r>
-              <a:rPr lang="en-US" b="1" dirty="0"/>
-              <a:t> </a:t>
-            </a:r>
-            <a:endParaRPr lang="en-US" b="1" dirty="0"/>
+            <a:endParaRPr lang="en-US" altLang="en-US" dirty="0"/>
           </a:p>
         </p:txBody>
       </p:sp>
